--- a/doc/Market_Intelligence_Whats_New_2.2.19.pptx
+++ b/doc/Market_Intelligence_Whats_New_2.2.19.pptx
@@ -206,7 +206,7 @@
           <a:p>
             <a:fld id="{5282F153-3F37-0F45-9E97-73ACFA13230C}" type="datetimeFigureOut">
               <a:rPr lang="en-US"/>
-              <a:t>7/8/26</a:t>
+              <a:t>7/9/26</a:t>
             </a:fld>
             <a:endParaRPr lang="en-US"/>
           </a:p>
@@ -2517,6 +2517,143 @@
               <a:t>1</a:t>
             </a:r>
             <a:endParaRPr lang="en-US" sz="900" dirty="0"/>
+          </a:p>
+        </p:txBody>
+      </p:sp>
+      <p:sp>
+        <p:nvSpPr>
+          <p:cNvPr id="19" name="Text 4">
+            <a:extLst>
+              <a:ext uri="{FF2B5EF4-FFF2-40B4-BE49-F238E27FC236}">
+                <a16:creationId xmlns:a16="http://schemas.microsoft.com/office/drawing/2014/main" id="{3343F0DA-B089-F204-C485-D6D47A4DCA49}"/>
+              </a:ext>
+            </a:extLst>
+          </p:cNvPr>
+          <p:cNvSpPr/>
+          <p:nvPr/>
+        </p:nvSpPr>
+        <p:spPr>
+          <a:xfrm>
+            <a:off x="566928" y="403860"/>
+            <a:ext cx="5808350" cy="457200"/>
+          </a:xfrm>
+          <a:prstGeom prst="rect">
+            <a:avLst/>
+          </a:prstGeom>
+          <a:noFill/>
+          <a:ln/>
+        </p:spPr>
+        <p:txBody>
+          <a:bodyPr wrap="square" lIns="0" tIns="0" rIns="0" bIns="0" rtlCol="0" anchor="ctr"/>
+          <a:lstStyle/>
+          <a:p>
+            <a:pPr>
+              <a:lnSpc>
+                <a:spcPct val="112000"/>
+              </a:lnSpc>
+            </a:pPr>
+            <a:r>
+              <a:rPr lang="en-US" sz="1600" dirty="0">
+                <a:solidFill>
+                  <a:schemeClr val="bg1"/>
+                </a:solidFill>
+                <a:latin typeface="Calibri" pitchFamily="34" charset="0"/>
+                <a:ea typeface="Calibri" pitchFamily="34" charset="-122"/>
+                <a:cs typeface="Calibri" pitchFamily="34" charset="-120"/>
+              </a:rPr>
+              <a:t>July 8, 2026</a:t>
+            </a:r>
+            <a:r>
+              <a:rPr lang="en-US" dirty="0">
+                <a:solidFill>
+                  <a:schemeClr val="bg1"/>
+                </a:solidFill>
+              </a:rPr>
+              <a:t> • </a:t>
+            </a:r>
+            <a:r>
+              <a:rPr lang="en-US" sz="1600" dirty="0">
+                <a:solidFill>
+                  <a:schemeClr val="bg1"/>
+                </a:solidFill>
+                <a:latin typeface="Calibri" pitchFamily="34" charset="0"/>
+                <a:ea typeface="Calibri" pitchFamily="34" charset="-122"/>
+                <a:cs typeface="Calibri" pitchFamily="34" charset="-120"/>
+              </a:rPr>
+              <a:t>Brandon _ India</a:t>
+            </a:r>
+            <a:r>
+              <a:rPr lang="en-US" dirty="0">
+                <a:solidFill>
+                  <a:schemeClr val="bg1"/>
+                </a:solidFill>
+              </a:rPr>
+              <a:t> • </a:t>
+            </a:r>
+            <a:r>
+              <a:rPr lang="en-US" sz="1600" dirty="0">
+                <a:solidFill>
+                  <a:schemeClr val="bg1"/>
+                </a:solidFill>
+                <a:latin typeface="Calibri" pitchFamily="34" charset="0"/>
+                <a:ea typeface="Calibri" pitchFamily="34" charset="-122"/>
+                <a:cs typeface="Calibri" pitchFamily="34" charset="-120"/>
+              </a:rPr>
+              <a:t> </a:t>
+            </a:r>
+            <a:endParaRPr lang="en-US" sz="1600" dirty="0">
+              <a:solidFill>
+                <a:schemeClr val="bg1"/>
+              </a:solidFill>
+            </a:endParaRPr>
+          </a:p>
+        </p:txBody>
+      </p:sp>
+      <p:sp>
+        <p:nvSpPr>
+          <p:cNvPr id="20" name="TextBox 19">
+            <a:extLst>
+              <a:ext uri="{FF2B5EF4-FFF2-40B4-BE49-F238E27FC236}">
+                <a16:creationId xmlns:a16="http://schemas.microsoft.com/office/drawing/2014/main" id="{6479D4E9-978F-6130-47FC-8DB1DE135A8C}"/>
+              </a:ext>
+            </a:extLst>
+          </p:cNvPr>
+          <p:cNvSpPr txBox="1"/>
+          <p:nvPr/>
+        </p:nvSpPr>
+        <p:spPr>
+          <a:xfrm>
+            <a:off x="3416808" y="462673"/>
+            <a:ext cx="2958470" cy="333617"/>
+          </a:xfrm>
+          <a:prstGeom prst="rect">
+            <a:avLst/>
+          </a:prstGeom>
+          <a:noFill/>
+        </p:spPr>
+        <p:txBody>
+          <a:bodyPr wrap="square">
+            <a:spAutoFit/>
+          </a:bodyPr>
+          <a:lstStyle/>
+          <a:p>
+            <a:pPr marL="0" indent="0">
+              <a:lnSpc>
+                <a:spcPct val="98000"/>
+              </a:lnSpc>
+              <a:buNone/>
+            </a:pPr>
+            <a:r>
+              <a:rPr lang="en-US" sz="1600" b="1" dirty="0">
+                <a:solidFill>
+                  <a:srgbClr val="FFFFFF"/>
+                </a:solidFill>
+                <a:latin typeface="Cambria" pitchFamily="34" charset="0"/>
+                <a:hlinkClick r:id="rId3"/>
+              </a:rPr>
+              <a:t>accountadmin@majikl.com</a:t>
+            </a:r>
+            <a:endParaRPr lang="en-US" sz="1600" dirty="0"/>
           </a:p>
         </p:txBody>
       </p:sp>
